--- a/public/fun/cards/beauty/beauty-27.pptx
+++ b/public/fun/cards/beauty/beauty-27.pptx
@@ -3085,7 +3085,7 @@
     <p:bg>
       <p:bgPr>
         <a:solidFill>
-          <a:srgbClr val="FBF8F2"/>
+          <a:srgbClr val="FFF3F2"/>
         </a:solidFill>
         <a:effectLst/>
       </p:bgPr>
@@ -3099,23 +3099,23 @@
       <p:grpSpPr/>
       <p:sp>
         <p:nvSpPr>
-          <p:cNvPr id="2" name="Rectangle 1"/>
+          <p:cNvPr id="2" name="Oval 1"/>
           <p:cNvSpPr/>
           <p:nvPr/>
         </p:nvSpPr>
         <p:spPr>
           <a:xfrm>
-            <a:off x="93600" y="93600"/>
-            <a:ext cx="3052800" cy="1612800"/>
+            <a:off x="1591200" y="208800"/>
+            <a:ext cx="57600" cy="57600"/>
           </a:xfrm>
-          <a:prstGeom prst="rect">
+          <a:prstGeom prst="ellipse">
             <a:avLst/>
           </a:prstGeom>
-          <a:noFill/>
-          <a:ln w="10800">
-            <a:solidFill>
-              <a:srgbClr val="915B3B"/>
-            </a:solidFill>
+          <a:solidFill>
+            <a:srgbClr val="FF8A7A"/>
+          </a:solidFill>
+          <a:ln>
+            <a:noFill/>
           </a:ln>
         </p:spPr>
         <p:txBody>
@@ -3128,43 +3128,14 @@
       </p:sp>
       <p:sp>
         <p:nvSpPr>
-          <p:cNvPr id="3" name="Rectangle 2"/>
-          <p:cNvSpPr/>
+          <p:cNvPr id="3" name="텍스트"/>
+          <p:cNvSpPr txBox="1"/>
           <p:nvPr/>
         </p:nvSpPr>
         <p:spPr>
           <a:xfrm>
-            <a:off x="144000" y="144000"/>
-            <a:ext cx="2952000" cy="1512000"/>
-          </a:xfrm>
-          <a:prstGeom prst="rect">
-            <a:avLst/>
-          </a:prstGeom>
-          <a:noFill/>
-          <a:ln w="5400">
-            <a:solidFill>
-              <a:srgbClr val="E0D1C8"/>
-            </a:solidFill>
-          </a:ln>
-        </p:spPr>
-        <p:txBody>
-          <a:bodyPr rtlCol="0" anchor="ctr"/>
-          <a:lstStyle/>
-          <a:p>
-            <a:pPr algn="ctr"/>
-          </a:p>
-        </p:txBody>
-      </p:sp>
-      <p:sp>
-        <p:nvSpPr>
-          <p:cNvPr id="4" name="텍스트"/>
-          <p:cNvSpPr txBox="1"/>
-          <p:nvPr/>
-        </p:nvSpPr>
-        <p:spPr>
-          <a:xfrm>
-            <a:off x="360000" y="280800"/>
-            <a:ext cx="2520000" cy="100800"/>
+            <a:off x="360000" y="468000"/>
+            <a:ext cx="2520000" cy="360000"/>
           </a:xfrm>
           <a:prstGeom prst="rect">
             <a:avLst/>
@@ -3179,32 +3150,32 @@
           <a:p>
             <a:pPr algn="ctr">
               <a:lnSpc>
-                <a:spcPts val="1015"/>
+                <a:spcPts val="3190"/>
               </a:lnSpc>
             </a:pPr>
             <a:r>
-              <a:rPr sz="700" b="1" spc="400">
+              <a:rPr sz="2200" b="1">
                 <a:solidFill>
-                  <a:srgbClr val="696C7F"/>
+                  <a:srgbClr val="12151C"/>
                 </a:solidFill>
                 <a:latin typeface="맑은 고딕"/>
                 <a:ea typeface="맑은 고딕"/>
               </a:rPr>
-              <a:t>샵 이름</a:t>
-            </a:r>
-          </a:p>
-        </p:txBody>
-      </p:sp>
-      <p:sp>
-        <p:nvSpPr>
-          <p:cNvPr id="5" name="텍스트"/>
+              <a:t>하지안</a:t>
+            </a:r>
+          </a:p>
+        </p:txBody>
+      </p:sp>
+      <p:sp>
+        <p:nvSpPr>
+          <p:cNvPr id="4" name="텍스트"/>
           <p:cNvSpPr txBox="1"/>
           <p:nvPr/>
         </p:nvSpPr>
         <p:spPr>
           <a:xfrm>
-            <a:off x="360000" y="468000"/>
-            <a:ext cx="2520000" cy="313692"/>
+            <a:off x="360000" y="878400"/>
+            <a:ext cx="2520000" cy="171451"/>
           </a:xfrm>
           <a:prstGeom prst="rect">
             <a:avLst/>
@@ -3219,19 +3190,48 @@
           <a:p>
             <a:pPr algn="ctr">
               <a:lnSpc>
-                <a:spcPts val="2755"/>
+                <a:spcPts val="1305"/>
               </a:lnSpc>
             </a:pPr>
             <a:r>
-              <a:rPr sz="1900" b="1" spc="50">
+              <a:rPr sz="900" b="0">
                 <a:solidFill>
-                  <a:srgbClr val="1B2041"/>
+                  <a:srgbClr val="6C4140"/>
                 </a:solidFill>
                 <a:latin typeface="맑은 고딕"/>
                 <a:ea typeface="맑은 고딕"/>
               </a:rPr>
-              <a:t>하지안</a:t>
-            </a:r>
+              <a:t>바버 · 대표</a:t>
+            </a:r>
+          </a:p>
+        </p:txBody>
+      </p:sp>
+      <p:sp>
+        <p:nvSpPr>
+          <p:cNvPr id="5" name="Rectangle 4"/>
+          <p:cNvSpPr/>
+          <p:nvPr/>
+        </p:nvSpPr>
+        <p:spPr>
+          <a:xfrm>
+            <a:off x="1530000" y="1137600"/>
+            <a:ext cx="180000" cy="14400"/>
+          </a:xfrm>
+          <a:prstGeom prst="rect">
+            <a:avLst/>
+          </a:prstGeom>
+          <a:solidFill>
+            <a:srgbClr val="FF8A7A"/>
+          </a:solidFill>
+          <a:ln>
+            <a:noFill/>
+          </a:ln>
+        </p:spPr>
+        <p:txBody>
+          <a:bodyPr rtlCol="0" anchor="ctr"/>
+          <a:lstStyle/>
+          <a:p>
+            <a:pPr algn="ctr"/>
           </a:p>
         </p:txBody>
       </p:sp>
@@ -3243,8 +3243,8 @@
         </p:nvSpPr>
         <p:spPr>
           <a:xfrm>
-            <a:off x="360000" y="784800"/>
-            <a:ext cx="2520000" cy="122400"/>
+            <a:off x="360000" y="1267200"/>
+            <a:ext cx="2520000" cy="133351"/>
           </a:xfrm>
           <a:prstGeom prst="rect">
             <a:avLst/>
@@ -3259,61 +3259,32 @@
           <a:p>
             <a:pPr algn="ctr">
               <a:lnSpc>
-                <a:spcPts val="1232"/>
+                <a:spcPts val="1015"/>
               </a:lnSpc>
             </a:pPr>
             <a:r>
-              <a:rPr sz="850" b="1">
+              <a:rPr sz="700" b="0">
                 <a:solidFill>
-                  <a:srgbClr val="915B3B"/>
+                  <a:srgbClr val="12151C"/>
                 </a:solidFill>
                 <a:latin typeface="맑은 고딕"/>
                 <a:ea typeface="맑은 고딕"/>
               </a:rPr>
-              <a:t>바버 · 대표</a:t>
-            </a:r>
-          </a:p>
-        </p:txBody>
-      </p:sp>
-      <p:sp>
-        <p:nvSpPr>
-          <p:cNvPr id="7" name="Rectangle 6"/>
-          <p:cNvSpPr/>
+              <a:t>010-1234-5678      name@example.com</a:t>
+            </a:r>
+          </a:p>
+        </p:txBody>
+      </p:sp>
+      <p:sp>
+        <p:nvSpPr>
+          <p:cNvPr id="7" name="텍스트"/>
+          <p:cNvSpPr txBox="1"/>
           <p:nvPr/>
         </p:nvSpPr>
         <p:spPr>
           <a:xfrm>
-            <a:off x="1530000" y="993600"/>
-            <a:ext cx="180000" cy="10800"/>
-          </a:xfrm>
-          <a:prstGeom prst="rect">
-            <a:avLst/>
-          </a:prstGeom>
-          <a:solidFill>
-            <a:srgbClr val="915B3B"/>
-          </a:solidFill>
-          <a:ln>
-            <a:noFill/>
-          </a:ln>
-        </p:spPr>
-        <p:txBody>
-          <a:bodyPr rtlCol="0" anchor="ctr"/>
-          <a:lstStyle/>
-          <a:p>
-            <a:pPr algn="ctr"/>
-          </a:p>
-        </p:txBody>
-      </p:sp>
-      <p:sp>
-        <p:nvSpPr>
-          <p:cNvPr id="8" name="텍스트"/>
-          <p:cNvSpPr txBox="1"/>
-          <p:nvPr/>
-        </p:nvSpPr>
-        <p:spPr>
-          <a:xfrm>
-            <a:off x="360000" y="1087200"/>
-            <a:ext cx="2520000" cy="108000"/>
+            <a:off x="360000" y="1425600"/>
+            <a:ext cx="2520000" cy="133351"/>
           </a:xfrm>
           <a:prstGeom prst="rect">
             <a:avLst/>
@@ -3328,32 +3299,32 @@
           <a:p>
             <a:pPr algn="ctr">
               <a:lnSpc>
-                <a:spcPts val="1087"/>
+                <a:spcPts val="1015"/>
               </a:lnSpc>
             </a:pPr>
             <a:r>
-              <a:rPr sz="750" b="0">
+              <a:rPr sz="700" b="0">
                 <a:solidFill>
-                  <a:srgbClr val="1B2041"/>
+                  <a:srgbClr val="6C4140"/>
                 </a:solidFill>
                 <a:latin typeface="맑은 고딕"/>
                 <a:ea typeface="맑은 고딕"/>
               </a:rPr>
-              <a:t>010-1234-5678</a:t>
-            </a:r>
-          </a:p>
-        </p:txBody>
-      </p:sp>
-      <p:sp>
-        <p:nvSpPr>
-          <p:cNvPr id="9" name="텍스트"/>
+              <a:t>주소를 입력해 주세요</a:t>
+            </a:r>
+          </a:p>
+        </p:txBody>
+      </p:sp>
+      <p:sp>
+        <p:nvSpPr>
+          <p:cNvPr id="8" name="텍스트"/>
           <p:cNvSpPr txBox="1"/>
           <p:nvPr/>
         </p:nvSpPr>
         <p:spPr>
           <a:xfrm>
-            <a:off x="360000" y="1209600"/>
-            <a:ext cx="2520000" cy="108000"/>
+            <a:off x="360000" y="1576800"/>
+            <a:ext cx="2520000" cy="104776"/>
           </a:xfrm>
           <a:prstGeom prst="rect">
             <a:avLst/>
@@ -3368,233 +3339,19 @@
           <a:p>
             <a:pPr algn="ctr">
               <a:lnSpc>
-                <a:spcPts val="1087"/>
+                <a:spcPts val="797"/>
               </a:lnSpc>
             </a:pPr>
             <a:r>
-              <a:rPr sz="750" b="0">
+              <a:rPr sz="550" b="1" spc="300">
                 <a:solidFill>
-                  <a:srgbClr val="1B2041"/>
+                  <a:srgbClr val="6C4140"/>
                 </a:solidFill>
                 <a:latin typeface="맑은 고딕"/>
                 <a:ea typeface="맑은 고딕"/>
               </a:rPr>
-              <a:t>name@example.com</a:t>
-            </a:r>
-          </a:p>
-        </p:txBody>
-      </p:sp>
-      <p:sp>
-        <p:nvSpPr>
-          <p:cNvPr id="10" name="텍스트"/>
-          <p:cNvSpPr txBox="1"/>
-          <p:nvPr/>
-        </p:nvSpPr>
-        <p:spPr>
-          <a:xfrm>
-            <a:off x="360000" y="1332000"/>
-            <a:ext cx="2520000" cy="108000"/>
-          </a:xfrm>
-          <a:prstGeom prst="rect">
-            <a:avLst/>
-          </a:prstGeom>
-          <a:noFill/>
-        </p:spPr>
-        <p:txBody>
-          <a:bodyPr wrap="square" lIns="0" rIns="0" tIns="0" bIns="0" anchor="t">
-            <a:spAutoFit/>
-          </a:bodyPr>
-          <a:lstStyle/>
-          <a:p>
-            <a:pPr algn="ctr">
-              <a:lnSpc>
-                <a:spcPts val="1015"/>
-              </a:lnSpc>
-            </a:pPr>
-            <a:r>
-              <a:rPr sz="700" b="0">
-                <a:solidFill>
-                  <a:srgbClr val="696C7F"/>
-                </a:solidFill>
-                <a:latin typeface="맑은 고딕"/>
-                <a:ea typeface="맑은 고딕"/>
-              </a:rPr>
-              <a:t>주소를 입력해 주세요</a:t>
-            </a:r>
-          </a:p>
-        </p:txBody>
-      </p:sp>
-      <p:sp>
-        <p:nvSpPr>
-          <p:cNvPr id="11" name="Oval 10"/>
-          <p:cNvSpPr/>
-          <p:nvPr/>
-        </p:nvSpPr>
-        <p:spPr>
-          <a:xfrm>
-            <a:off x="1602216" y="1485072"/>
-            <a:ext cx="35568" cy="60192"/>
-          </a:xfrm>
-          <a:prstGeom prst="ellipse">
-            <a:avLst/>
-          </a:prstGeom>
-          <a:solidFill>
-            <a:srgbClr val="915B3B"/>
-          </a:solidFill>
-          <a:ln>
-            <a:noFill/>
-          </a:ln>
-        </p:spPr>
-        <p:txBody>
-          <a:bodyPr rtlCol="0" anchor="ctr"/>
-          <a:lstStyle/>
-          <a:p>
-            <a:pPr algn="ctr"/>
-          </a:p>
-        </p:txBody>
-      </p:sp>
-      <p:sp>
-        <p:nvSpPr>
-          <p:cNvPr id="12" name="Oval 11"/>
-          <p:cNvSpPr/>
-          <p:nvPr/>
-        </p:nvSpPr>
-        <p:spPr>
-          <a:xfrm rot="4320000">
-            <a:off x="1633441" y="1507758"/>
-            <a:ext cx="35568" cy="60192"/>
-          </a:xfrm>
-          <a:prstGeom prst="ellipse">
-            <a:avLst/>
-          </a:prstGeom>
-          <a:solidFill>
-            <a:srgbClr val="915B3B"/>
-          </a:solidFill>
-          <a:ln>
-            <a:noFill/>
-          </a:ln>
-        </p:spPr>
-        <p:txBody>
-          <a:bodyPr rtlCol="0" anchor="ctr"/>
-          <a:lstStyle/>
-          <a:p>
-            <a:pPr algn="ctr"/>
-          </a:p>
-        </p:txBody>
-      </p:sp>
-      <p:sp>
-        <p:nvSpPr>
-          <p:cNvPr id="13" name="Oval 12"/>
-          <p:cNvSpPr/>
-          <p:nvPr/>
-        </p:nvSpPr>
-        <p:spPr>
-          <a:xfrm rot="8640000">
-            <a:off x="1621514" y="1544466"/>
-            <a:ext cx="35568" cy="60192"/>
-          </a:xfrm>
-          <a:prstGeom prst="ellipse">
-            <a:avLst/>
-          </a:prstGeom>
-          <a:solidFill>
-            <a:srgbClr val="915B3B"/>
-          </a:solidFill>
-          <a:ln>
-            <a:noFill/>
-          </a:ln>
-        </p:spPr>
-        <p:txBody>
-          <a:bodyPr rtlCol="0" anchor="ctr"/>
-          <a:lstStyle/>
-          <a:p>
-            <a:pPr algn="ctr"/>
-          </a:p>
-        </p:txBody>
-      </p:sp>
-      <p:sp>
-        <p:nvSpPr>
-          <p:cNvPr id="14" name="Oval 13"/>
-          <p:cNvSpPr/>
-          <p:nvPr/>
-        </p:nvSpPr>
-        <p:spPr>
-          <a:xfrm rot="12960000">
-            <a:off x="1582918" y="1544466"/>
-            <a:ext cx="35568" cy="60192"/>
-          </a:xfrm>
-          <a:prstGeom prst="ellipse">
-            <a:avLst/>
-          </a:prstGeom>
-          <a:solidFill>
-            <a:srgbClr val="915B3B"/>
-          </a:solidFill>
-          <a:ln>
-            <a:noFill/>
-          </a:ln>
-        </p:spPr>
-        <p:txBody>
-          <a:bodyPr rtlCol="0" anchor="ctr"/>
-          <a:lstStyle/>
-          <a:p>
-            <a:pPr algn="ctr"/>
-          </a:p>
-        </p:txBody>
-      </p:sp>
-      <p:sp>
-        <p:nvSpPr>
-          <p:cNvPr id="15" name="Oval 14"/>
-          <p:cNvSpPr/>
-          <p:nvPr/>
-        </p:nvSpPr>
-        <p:spPr>
-          <a:xfrm rot="17280000">
-            <a:off x="1570991" y="1507758"/>
-            <a:ext cx="35568" cy="60192"/>
-          </a:xfrm>
-          <a:prstGeom prst="ellipse">
-            <a:avLst/>
-          </a:prstGeom>
-          <a:solidFill>
-            <a:srgbClr val="915B3B"/>
-          </a:solidFill>
-          <a:ln>
-            <a:noFill/>
-          </a:ln>
-        </p:spPr>
-        <p:txBody>
-          <a:bodyPr rtlCol="0" anchor="ctr"/>
-          <a:lstStyle/>
-          <a:p>
-            <a:pPr algn="ctr"/>
-          </a:p>
-        </p:txBody>
-      </p:sp>
-      <p:sp>
-        <p:nvSpPr>
-          <p:cNvPr id="16" name="Oval 15"/>
-          <p:cNvSpPr/>
-          <p:nvPr/>
-        </p:nvSpPr>
-        <p:spPr>
-          <a:xfrm>
-            <a:off x="1604952" y="1532952"/>
-            <a:ext cx="30096" cy="30096"/>
-          </a:xfrm>
-          <a:prstGeom prst="ellipse">
-            <a:avLst/>
-          </a:prstGeom>
-          <a:solidFill>
-            <a:srgbClr val="E0D1C8"/>
-          </a:solidFill>
-          <a:ln>
-            <a:noFill/>
-          </a:ln>
-        </p:spPr>
-        <p:txBody>
-          <a:bodyPr rtlCol="0" anchor="ctr"/>
-          <a:lstStyle/>
-          <a:p>
-            <a:pPr algn="ctr"/>
+              <a:t>샵 이름</a:t>
+            </a:r>
           </a:p>
         </p:txBody>
       </p:sp>
@@ -3612,7 +3369,7 @@
     <p:bg>
       <p:bgPr>
         <a:solidFill>
-          <a:srgbClr val="FBF8F2"/>
+          <a:srgbClr val="F3F4F6"/>
         </a:solidFill>
         <a:effectLst/>
       </p:bgPr>
@@ -3632,14 +3389,14 @@
         </p:nvSpPr>
         <p:spPr>
           <a:xfrm>
-            <a:off x="0" y="0"/>
-            <a:ext cx="3240000" cy="1800000"/>
+            <a:off x="252000" y="540000"/>
+            <a:ext cx="28800" cy="720000"/>
           </a:xfrm>
           <a:prstGeom prst="rect">
             <a:avLst/>
           </a:prstGeom>
           <a:solidFill>
-            <a:srgbClr val="915B3B"/>
+            <a:srgbClr val="FF8A7A"/>
           </a:solidFill>
           <a:ln>
             <a:noFill/>
@@ -3655,188 +3412,14 @@
       </p:sp>
       <p:sp>
         <p:nvSpPr>
-          <p:cNvPr id="3" name="Oval 2"/>
-          <p:cNvSpPr/>
+          <p:cNvPr id="3" name="텍스트"/>
+          <p:cNvSpPr txBox="1"/>
           <p:nvPr/>
         </p:nvSpPr>
         <p:spPr>
           <a:xfrm>
-            <a:off x="1573200" y="374400"/>
-            <a:ext cx="93600" cy="158400"/>
-          </a:xfrm>
-          <a:prstGeom prst="ellipse">
-            <a:avLst/>
-          </a:prstGeom>
-          <a:solidFill>
-            <a:srgbClr val="FFFFFF"/>
-          </a:solidFill>
-          <a:ln>
-            <a:noFill/>
-          </a:ln>
-        </p:spPr>
-        <p:txBody>
-          <a:bodyPr rtlCol="0" anchor="ctr"/>
-          <a:lstStyle/>
-          <a:p>
-            <a:pPr algn="ctr"/>
-          </a:p>
-        </p:txBody>
-      </p:sp>
-      <p:sp>
-        <p:nvSpPr>
-          <p:cNvPr id="4" name="Oval 3"/>
-          <p:cNvSpPr/>
-          <p:nvPr/>
-        </p:nvSpPr>
-        <p:spPr>
-          <a:xfrm rot="4320000">
-            <a:off x="1655371" y="434101"/>
-            <a:ext cx="93600" cy="158400"/>
-          </a:xfrm>
-          <a:prstGeom prst="ellipse">
-            <a:avLst/>
-          </a:prstGeom>
-          <a:solidFill>
-            <a:srgbClr val="FFFFFF"/>
-          </a:solidFill>
-          <a:ln>
-            <a:noFill/>
-          </a:ln>
-        </p:spPr>
-        <p:txBody>
-          <a:bodyPr rtlCol="0" anchor="ctr"/>
-          <a:lstStyle/>
-          <a:p>
-            <a:pPr algn="ctr"/>
-          </a:p>
-        </p:txBody>
-      </p:sp>
-      <p:sp>
-        <p:nvSpPr>
-          <p:cNvPr id="5" name="Oval 4"/>
-          <p:cNvSpPr/>
-          <p:nvPr/>
-        </p:nvSpPr>
-        <p:spPr>
-          <a:xfrm rot="8640000">
-            <a:off x="1623985" y="530699"/>
-            <a:ext cx="93600" cy="158400"/>
-          </a:xfrm>
-          <a:prstGeom prst="ellipse">
-            <a:avLst/>
-          </a:prstGeom>
-          <a:solidFill>
-            <a:srgbClr val="FFFFFF"/>
-          </a:solidFill>
-          <a:ln>
-            <a:noFill/>
-          </a:ln>
-        </p:spPr>
-        <p:txBody>
-          <a:bodyPr rtlCol="0" anchor="ctr"/>
-          <a:lstStyle/>
-          <a:p>
-            <a:pPr algn="ctr"/>
-          </a:p>
-        </p:txBody>
-      </p:sp>
-      <p:sp>
-        <p:nvSpPr>
-          <p:cNvPr id="6" name="Oval 5"/>
-          <p:cNvSpPr/>
-          <p:nvPr/>
-        </p:nvSpPr>
-        <p:spPr>
-          <a:xfrm rot="12960000">
-            <a:off x="1522415" y="530699"/>
-            <a:ext cx="93600" cy="158400"/>
-          </a:xfrm>
-          <a:prstGeom prst="ellipse">
-            <a:avLst/>
-          </a:prstGeom>
-          <a:solidFill>
-            <a:srgbClr val="FFFFFF"/>
-          </a:solidFill>
-          <a:ln>
-            <a:noFill/>
-          </a:ln>
-        </p:spPr>
-        <p:txBody>
-          <a:bodyPr rtlCol="0" anchor="ctr"/>
-          <a:lstStyle/>
-          <a:p>
-            <a:pPr algn="ctr"/>
-          </a:p>
-        </p:txBody>
-      </p:sp>
-      <p:sp>
-        <p:nvSpPr>
-          <p:cNvPr id="7" name="Oval 6"/>
-          <p:cNvSpPr/>
-          <p:nvPr/>
-        </p:nvSpPr>
-        <p:spPr>
-          <a:xfrm rot="17280000">
-            <a:off x="1491029" y="434101"/>
-            <a:ext cx="93600" cy="158400"/>
-          </a:xfrm>
-          <a:prstGeom prst="ellipse">
-            <a:avLst/>
-          </a:prstGeom>
-          <a:solidFill>
-            <a:srgbClr val="FFFFFF"/>
-          </a:solidFill>
-          <a:ln>
-            <a:noFill/>
-          </a:ln>
-        </p:spPr>
-        <p:txBody>
-          <a:bodyPr rtlCol="0" anchor="ctr"/>
-          <a:lstStyle/>
-          <a:p>
-            <a:pPr algn="ctr"/>
-          </a:p>
-        </p:txBody>
-      </p:sp>
-      <p:sp>
-        <p:nvSpPr>
-          <p:cNvPr id="8" name="Oval 7"/>
-          <p:cNvSpPr/>
-          <p:nvPr/>
-        </p:nvSpPr>
-        <p:spPr>
-          <a:xfrm>
-            <a:off x="1580400" y="500400"/>
-            <a:ext cx="79200" cy="79200"/>
-          </a:xfrm>
-          <a:prstGeom prst="ellipse">
-            <a:avLst/>
-          </a:prstGeom>
-          <a:solidFill>
-            <a:srgbClr val="737373"/>
-          </a:solidFill>
-          <a:ln>
-            <a:noFill/>
-          </a:ln>
-        </p:spPr>
-        <p:txBody>
-          <a:bodyPr rtlCol="0" anchor="ctr"/>
-          <a:lstStyle/>
-          <a:p>
-            <a:pPr algn="ctr"/>
-          </a:p>
-        </p:txBody>
-      </p:sp>
-      <p:sp>
-        <p:nvSpPr>
-          <p:cNvPr id="9" name="텍스트"/>
-          <p:cNvSpPr txBox="1"/>
-          <p:nvPr/>
-        </p:nvSpPr>
-        <p:spPr>
-          <a:xfrm>
-            <a:off x="396000" y="835200"/>
-            <a:ext cx="2448000" cy="396000"/>
+            <a:off x="424800" y="612000"/>
+            <a:ext cx="2160000" cy="648000"/>
           </a:xfrm>
           <a:prstGeom prst="rect">
             <a:avLst/>
@@ -3844,39 +3427,56 @@
           <a:noFill/>
         </p:spPr>
         <p:txBody>
-          <a:bodyPr wrap="square" lIns="0" rIns="0" tIns="0" bIns="0" anchor="ctr">
+          <a:bodyPr wrap="square" lIns="0" rIns="0" tIns="0" bIns="0" anchor="t">
             <a:spAutoFit/>
           </a:bodyPr>
           <a:lstStyle/>
           <a:p>
-            <a:pPr algn="ctr">
+            <a:pPr algn="l">
               <a:lnSpc>
-                <a:spcPts val="1667"/>
+                <a:spcPts val="1812"/>
               </a:lnSpc>
             </a:pPr>
             <a:r>
-              <a:rPr sz="1150" b="1">
+              <a:rPr sz="1250" b="1">
                 <a:solidFill>
-                  <a:srgbClr val="FFFFFF"/>
+                  <a:srgbClr val="12151C"/>
                 </a:solidFill>
                 <a:latin typeface="맑은 고딕"/>
                 <a:ea typeface="맑은 고딕"/>
               </a:rPr>
-              <a:t>가장 편안한 모습으로 돌려드립니다</a:t>
-            </a:r>
-          </a:p>
-        </p:txBody>
-      </p:sp>
-      <p:sp>
-        <p:nvSpPr>
-          <p:cNvPr id="10" name="텍스트"/>
+              <a:t>가장 편안한 모습으로</a:t>
+            </a:r>
+          </a:p>
+          <a:p>
+            <a:pPr algn="l">
+              <a:lnSpc>
+                <a:spcPts val="1812"/>
+              </a:lnSpc>
+            </a:pPr>
+            <a:r>
+              <a:rPr sz="1250" b="1">
+                <a:solidFill>
+                  <a:srgbClr val="12151C"/>
+                </a:solidFill>
+                <a:latin typeface="맑은 고딕"/>
+                <a:ea typeface="맑은 고딕"/>
+              </a:rPr>
+              <a:t>돌려드립니다</a:t>
+            </a:r>
+          </a:p>
+        </p:txBody>
+      </p:sp>
+      <p:sp>
+        <p:nvSpPr>
+          <p:cNvPr id="4" name="텍스트"/>
           <p:cNvSpPr txBox="1"/>
           <p:nvPr/>
         </p:nvSpPr>
         <p:spPr>
           <a:xfrm>
-            <a:off x="360000" y="1476000"/>
-            <a:ext cx="2520000" cy="108000"/>
+            <a:off x="424800" y="1512000"/>
+            <a:ext cx="1800000" cy="123826"/>
           </a:xfrm>
           <a:prstGeom prst="rect">
             <a:avLst/>
@@ -3889,15 +3489,15 @@
           </a:bodyPr>
           <a:lstStyle/>
           <a:p>
-            <a:pPr algn="ctr">
+            <a:pPr algn="l">
               <a:lnSpc>
-                <a:spcPts val="1015"/>
+                <a:spcPts val="942"/>
               </a:lnSpc>
             </a:pPr>
             <a:r>
-              <a:rPr sz="700" b="1" spc="300">
+              <a:rPr sz="650" b="1" spc="200">
                 <a:solidFill>
-                  <a:srgbClr val="FFFFFF"/>
+                  <a:srgbClr val="6B7280"/>
                 </a:solidFill>
                 <a:latin typeface="맑은 고딕"/>
                 <a:ea typeface="맑은 고딕"/>

--- a/public/fun/cards/beauty/beauty-27.pptx
+++ b/public/fun/cards/beauty/beauty-27.pptx
@@ -3097,25 +3097,193 @@
         <p:nvPr/>
       </p:nvGrpSpPr>
       <p:grpSpPr/>
-      <p:sp>
-        <p:nvSpPr>
-          <p:cNvPr id="2" name="Oval 1"/>
+      <p:cxnSp>
+        <p:nvCxnSpPr>
+          <p:cNvPr id="2" name="Connector 1"/>
+          <p:cNvCxnSpPr/>
+          <p:nvPr/>
+        </p:nvCxnSpPr>
+        <p:spPr>
+          <a:xfrm>
+            <a:off x="93600" y="122400"/>
+            <a:ext cx="57600" cy="0"/>
+          </a:xfrm>
+          <a:prstGeom prst="line">
+            <a:avLst/>
+          </a:prstGeom>
+          <a:ln w="3600">
+            <a:solidFill>
+              <a:srgbClr val="FFDEDA"/>
+            </a:solidFill>
+          </a:ln>
+        </p:spPr>
+      </p:cxnSp>
+      <p:cxnSp>
+        <p:nvCxnSpPr>
+          <p:cNvPr id="3" name="Connector 2"/>
+          <p:cNvCxnSpPr/>
+          <p:nvPr/>
+        </p:nvCxnSpPr>
+        <p:spPr>
+          <a:xfrm>
+            <a:off x="122400" y="93600"/>
+            <a:ext cx="0" cy="57600"/>
+          </a:xfrm>
+          <a:prstGeom prst="line">
+            <a:avLst/>
+          </a:prstGeom>
+          <a:ln w="3600">
+            <a:solidFill>
+              <a:srgbClr val="FFDEDA"/>
+            </a:solidFill>
+          </a:ln>
+        </p:spPr>
+      </p:cxnSp>
+      <p:cxnSp>
+        <p:nvCxnSpPr>
+          <p:cNvPr id="4" name="Connector 3"/>
+          <p:cNvCxnSpPr/>
+          <p:nvPr/>
+        </p:nvCxnSpPr>
+        <p:spPr>
+          <a:xfrm>
+            <a:off x="3088800" y="122400"/>
+            <a:ext cx="57600" cy="0"/>
+          </a:xfrm>
+          <a:prstGeom prst="line">
+            <a:avLst/>
+          </a:prstGeom>
+          <a:ln w="3600">
+            <a:solidFill>
+              <a:srgbClr val="FFDEDA"/>
+            </a:solidFill>
+          </a:ln>
+        </p:spPr>
+      </p:cxnSp>
+      <p:cxnSp>
+        <p:nvCxnSpPr>
+          <p:cNvPr id="5" name="Connector 4"/>
+          <p:cNvCxnSpPr/>
+          <p:nvPr/>
+        </p:nvCxnSpPr>
+        <p:spPr>
+          <a:xfrm>
+            <a:off x="3117600" y="93600"/>
+            <a:ext cx="0" cy="57600"/>
+          </a:xfrm>
+          <a:prstGeom prst="line">
+            <a:avLst/>
+          </a:prstGeom>
+          <a:ln w="3600">
+            <a:solidFill>
+              <a:srgbClr val="FFDEDA"/>
+            </a:solidFill>
+          </a:ln>
+        </p:spPr>
+      </p:cxnSp>
+      <p:cxnSp>
+        <p:nvCxnSpPr>
+          <p:cNvPr id="6" name="Connector 5"/>
+          <p:cNvCxnSpPr/>
+          <p:nvPr/>
+        </p:nvCxnSpPr>
+        <p:spPr>
+          <a:xfrm>
+            <a:off x="93600" y="1677600"/>
+            <a:ext cx="57600" cy="0"/>
+          </a:xfrm>
+          <a:prstGeom prst="line">
+            <a:avLst/>
+          </a:prstGeom>
+          <a:ln w="3600">
+            <a:solidFill>
+              <a:srgbClr val="FFDEDA"/>
+            </a:solidFill>
+          </a:ln>
+        </p:spPr>
+      </p:cxnSp>
+      <p:cxnSp>
+        <p:nvCxnSpPr>
+          <p:cNvPr id="7" name="Connector 6"/>
+          <p:cNvCxnSpPr/>
+          <p:nvPr/>
+        </p:nvCxnSpPr>
+        <p:spPr>
+          <a:xfrm>
+            <a:off x="122400" y="1648800"/>
+            <a:ext cx="0" cy="57600"/>
+          </a:xfrm>
+          <a:prstGeom prst="line">
+            <a:avLst/>
+          </a:prstGeom>
+          <a:ln w="3600">
+            <a:solidFill>
+              <a:srgbClr val="FFDEDA"/>
+            </a:solidFill>
+          </a:ln>
+        </p:spPr>
+      </p:cxnSp>
+      <p:cxnSp>
+        <p:nvCxnSpPr>
+          <p:cNvPr id="8" name="Connector 7"/>
+          <p:cNvCxnSpPr/>
+          <p:nvPr/>
+        </p:nvCxnSpPr>
+        <p:spPr>
+          <a:xfrm>
+            <a:off x="3088800" y="1677600"/>
+            <a:ext cx="57600" cy="0"/>
+          </a:xfrm>
+          <a:prstGeom prst="line">
+            <a:avLst/>
+          </a:prstGeom>
+          <a:ln w="3600">
+            <a:solidFill>
+              <a:srgbClr val="FFDEDA"/>
+            </a:solidFill>
+          </a:ln>
+        </p:spPr>
+      </p:cxnSp>
+      <p:cxnSp>
+        <p:nvCxnSpPr>
+          <p:cNvPr id="9" name="Connector 8"/>
+          <p:cNvCxnSpPr/>
+          <p:nvPr/>
+        </p:nvCxnSpPr>
+        <p:spPr>
+          <a:xfrm>
+            <a:off x="3117600" y="1648800"/>
+            <a:ext cx="0" cy="57600"/>
+          </a:xfrm>
+          <a:prstGeom prst="line">
+            <a:avLst/>
+          </a:prstGeom>
+          <a:ln w="3600">
+            <a:solidFill>
+              <a:srgbClr val="FFDEDA"/>
+            </a:solidFill>
+          </a:ln>
+        </p:spPr>
+      </p:cxnSp>
+      <p:sp>
+        <p:nvSpPr>
+          <p:cNvPr id="10" name="Oval 9"/>
           <p:cNvSpPr/>
           <p:nvPr/>
         </p:nvSpPr>
         <p:spPr>
           <a:xfrm>
-            <a:off x="1591200" y="208800"/>
-            <a:ext cx="57600" cy="57600"/>
+            <a:off x="1526400" y="237600"/>
+            <a:ext cx="187200" cy="187200"/>
           </a:xfrm>
           <a:prstGeom prst="ellipse">
             <a:avLst/>
           </a:prstGeom>
-          <a:solidFill>
-            <a:srgbClr val="FF8A7A"/>
-          </a:solidFill>
-          <a:ln>
-            <a:noFill/>
+          <a:noFill/>
+          <a:ln w="5040">
+            <a:solidFill>
+              <a:srgbClr val="FF8A7A"/>
+            </a:solidFill>
           </a:ln>
         </p:spPr>
         <p:txBody>
@@ -3128,14 +3296,14 @@
       </p:sp>
       <p:sp>
         <p:nvSpPr>
-          <p:cNvPr id="3" name="텍스트"/>
+          <p:cNvPr id="11" name="텍스트"/>
           <p:cNvSpPr txBox="1"/>
           <p:nvPr/>
         </p:nvSpPr>
         <p:spPr>
           <a:xfrm>
-            <a:off x="360000" y="468000"/>
-            <a:ext cx="2520000" cy="360000"/>
+            <a:off x="1476000" y="237600"/>
+            <a:ext cx="288000" cy="187200"/>
           </a:xfrm>
           <a:prstGeom prst="rect">
             <a:avLst/>
@@ -3143,6 +3311,46 @@
           <a:noFill/>
         </p:spPr>
         <p:txBody>
+          <a:bodyPr wrap="square" lIns="0" rIns="0" tIns="0" bIns="0" anchor="ctr">
+            <a:spAutoFit/>
+          </a:bodyPr>
+          <a:lstStyle/>
+          <a:p>
+            <a:pPr algn="ctr">
+              <a:lnSpc>
+                <a:spcPts val="1305"/>
+              </a:lnSpc>
+            </a:pPr>
+            <a:r>
+              <a:rPr sz="900" b="1">
+                <a:solidFill>
+                  <a:srgbClr val="FF8A7A"/>
+                </a:solidFill>
+                <a:latin typeface="맑은 고딕"/>
+                <a:ea typeface="맑은 고딕"/>
+              </a:rPr>
+              <a:t>샵</a:t>
+            </a:r>
+          </a:p>
+        </p:txBody>
+      </p:sp>
+      <p:sp>
+        <p:nvSpPr>
+          <p:cNvPr id="12" name="텍스트"/>
+          <p:cNvSpPr txBox="1"/>
+          <p:nvPr/>
+        </p:nvSpPr>
+        <p:spPr>
+          <a:xfrm>
+            <a:off x="360000" y="540000"/>
+            <a:ext cx="2520000" cy="237600"/>
+          </a:xfrm>
+          <a:prstGeom prst="rect">
+            <a:avLst/>
+          </a:prstGeom>
+          <a:noFill/>
+        </p:spPr>
+        <p:txBody>
           <a:bodyPr wrap="square" lIns="0" rIns="0" tIns="0" bIns="0" anchor="t">
             <a:spAutoFit/>
           </a:bodyPr>
@@ -3150,11 +3358,11 @@
           <a:p>
             <a:pPr algn="ctr">
               <a:lnSpc>
-                <a:spcPts val="3190"/>
+                <a:spcPts val="1957"/>
               </a:lnSpc>
             </a:pPr>
             <a:r>
-              <a:rPr sz="2200" b="1">
+              <a:rPr sz="1350" b="1" spc="120">
                 <a:solidFill>
                   <a:srgbClr val="12151C"/>
                 </a:solidFill>
@@ -3168,14 +3376,14 @@
       </p:sp>
       <p:sp>
         <p:nvSpPr>
-          <p:cNvPr id="4" name="텍스트"/>
+          <p:cNvPr id="13" name="텍스트"/>
           <p:cNvSpPr txBox="1"/>
           <p:nvPr/>
         </p:nvSpPr>
         <p:spPr>
           <a:xfrm>
-            <a:off x="360000" y="878400"/>
-            <a:ext cx="2520000" cy="171451"/>
+            <a:off x="360000" y="792000"/>
+            <a:ext cx="2520000" cy="133351"/>
           </a:xfrm>
           <a:prstGeom prst="rect">
             <a:avLst/>
@@ -3190,11 +3398,11 @@
           <a:p>
             <a:pPr algn="ctr">
               <a:lnSpc>
-                <a:spcPts val="1305"/>
+                <a:spcPts val="1015"/>
               </a:lnSpc>
             </a:pPr>
             <a:r>
-              <a:rPr sz="900" b="0">
+              <a:rPr sz="700" b="0" spc="60">
                 <a:solidFill>
                   <a:srgbClr val="6C4140"/>
                 </a:solidFill>
@@ -3206,45 +3414,37 @@
           </a:p>
         </p:txBody>
       </p:sp>
-      <p:sp>
-        <p:nvSpPr>
-          <p:cNvPr id="5" name="Rectangle 4"/>
-          <p:cNvSpPr/>
+      <p:cxnSp>
+        <p:nvCxnSpPr>
+          <p:cNvPr id="14" name="Connector 13"/>
+          <p:cNvCxnSpPr/>
           <p:nvPr/>
-        </p:nvSpPr>
-        <p:spPr>
-          <a:xfrm>
-            <a:off x="1530000" y="1137600"/>
-            <a:ext cx="180000" cy="14400"/>
-          </a:xfrm>
-          <a:prstGeom prst="rect">
+        </p:nvCxnSpPr>
+        <p:spPr>
+          <a:xfrm>
+            <a:off x="1440000" y="1015200"/>
+            <a:ext cx="360000" cy="0"/>
+          </a:xfrm>
+          <a:prstGeom prst="line">
             <a:avLst/>
           </a:prstGeom>
-          <a:solidFill>
-            <a:srgbClr val="FF8A7A"/>
-          </a:solidFill>
-          <a:ln>
-            <a:noFill/>
+          <a:ln w="7920">
+            <a:solidFill>
+              <a:srgbClr val="FF8A7A"/>
+            </a:solidFill>
           </a:ln>
         </p:spPr>
-        <p:txBody>
-          <a:bodyPr rtlCol="0" anchor="ctr"/>
-          <a:lstStyle/>
-          <a:p>
-            <a:pPr algn="ctr"/>
-          </a:p>
-        </p:txBody>
-      </p:sp>
-      <p:sp>
-        <p:nvSpPr>
-          <p:cNvPr id="6" name="텍스트"/>
+      </p:cxnSp>
+      <p:sp>
+        <p:nvSpPr>
+          <p:cNvPr id="15" name="텍스트"/>
           <p:cNvSpPr txBox="1"/>
           <p:nvPr/>
         </p:nvSpPr>
         <p:spPr>
           <a:xfrm>
-            <a:off x="360000" y="1267200"/>
-            <a:ext cx="2520000" cy="133351"/>
+            <a:off x="360000" y="1101600"/>
+            <a:ext cx="2520000" cy="123826"/>
           </a:xfrm>
           <a:prstGeom prst="rect">
             <a:avLst/>
@@ -3259,32 +3459,72 @@
           <a:p>
             <a:pPr algn="ctr">
               <a:lnSpc>
-                <a:spcPts val="1015"/>
+                <a:spcPts val="942"/>
               </a:lnSpc>
             </a:pPr>
             <a:r>
-              <a:rPr sz="700" b="0">
+              <a:rPr sz="650" b="1" spc="220">
+                <a:solidFill>
+                  <a:srgbClr val="6C4140"/>
+                </a:solidFill>
+                <a:latin typeface="맑은 고딕"/>
+                <a:ea typeface="맑은 고딕"/>
+              </a:rPr>
+              <a:t>샵 이름</a:t>
+            </a:r>
+          </a:p>
+        </p:txBody>
+      </p:sp>
+      <p:sp>
+        <p:nvSpPr>
+          <p:cNvPr id="16" name="텍스트"/>
+          <p:cNvSpPr txBox="1"/>
+          <p:nvPr/>
+        </p:nvSpPr>
+        <p:spPr>
+          <a:xfrm>
+            <a:off x="360000" y="1339200"/>
+            <a:ext cx="2520000" cy="123826"/>
+          </a:xfrm>
+          <a:prstGeom prst="rect">
+            <a:avLst/>
+          </a:prstGeom>
+          <a:noFill/>
+        </p:spPr>
+        <p:txBody>
+          <a:bodyPr wrap="square" lIns="0" rIns="0" tIns="0" bIns="0" anchor="t">
+            <a:spAutoFit/>
+          </a:bodyPr>
+          <a:lstStyle/>
+          <a:p>
+            <a:pPr algn="ctr">
+              <a:lnSpc>
+                <a:spcPts val="942"/>
+              </a:lnSpc>
+            </a:pPr>
+            <a:r>
+              <a:rPr sz="650" b="0">
                 <a:solidFill>
                   <a:srgbClr val="12151C"/>
                 </a:solidFill>
                 <a:latin typeface="맑은 고딕"/>
                 <a:ea typeface="맑은 고딕"/>
               </a:rPr>
-              <a:t>010-1234-5678      name@example.com</a:t>
-            </a:r>
-          </a:p>
-        </p:txBody>
-      </p:sp>
-      <p:sp>
-        <p:nvSpPr>
-          <p:cNvPr id="7" name="텍스트"/>
+              <a:t>010-1234-5678     |     name@example.com</a:t>
+            </a:r>
+          </a:p>
+        </p:txBody>
+      </p:sp>
+      <p:sp>
+        <p:nvSpPr>
+          <p:cNvPr id="17" name="텍스트"/>
           <p:cNvSpPr txBox="1"/>
           <p:nvPr/>
         </p:nvSpPr>
         <p:spPr>
           <a:xfrm>
-            <a:off x="360000" y="1425600"/>
-            <a:ext cx="2520000" cy="133351"/>
+            <a:off x="360000" y="1476000"/>
+            <a:ext cx="2520000" cy="123826"/>
           </a:xfrm>
           <a:prstGeom prst="rect">
             <a:avLst/>
@@ -3299,11 +3539,11 @@
           <a:p>
             <a:pPr algn="ctr">
               <a:lnSpc>
-                <a:spcPts val="1015"/>
+                <a:spcPts val="942"/>
               </a:lnSpc>
             </a:pPr>
             <a:r>
-              <a:rPr sz="700" b="0">
+              <a:rPr sz="650" b="0">
                 <a:solidFill>
                   <a:srgbClr val="6C4140"/>
                 </a:solidFill>
@@ -3311,46 +3551,6 @@
                 <a:ea typeface="맑은 고딕"/>
               </a:rPr>
               <a:t>주소를 입력해 주세요</a:t>
-            </a:r>
-          </a:p>
-        </p:txBody>
-      </p:sp>
-      <p:sp>
-        <p:nvSpPr>
-          <p:cNvPr id="8" name="텍스트"/>
-          <p:cNvSpPr txBox="1"/>
-          <p:nvPr/>
-        </p:nvSpPr>
-        <p:spPr>
-          <a:xfrm>
-            <a:off x="360000" y="1576800"/>
-            <a:ext cx="2520000" cy="104776"/>
-          </a:xfrm>
-          <a:prstGeom prst="rect">
-            <a:avLst/>
-          </a:prstGeom>
-          <a:noFill/>
-        </p:spPr>
-        <p:txBody>
-          <a:bodyPr wrap="square" lIns="0" rIns="0" tIns="0" bIns="0" anchor="t">
-            <a:spAutoFit/>
-          </a:bodyPr>
-          <a:lstStyle/>
-          <a:p>
-            <a:pPr algn="ctr">
-              <a:lnSpc>
-                <a:spcPts val="797"/>
-              </a:lnSpc>
-            </a:pPr>
-            <a:r>
-              <a:rPr sz="550" b="1" spc="300">
-                <a:solidFill>
-                  <a:srgbClr val="6C4140"/>
-                </a:solidFill>
-                <a:latin typeface="맑은 고딕"/>
-                <a:ea typeface="맑은 고딕"/>
-              </a:rPr>
-              <a:t>샵 이름</a:t>
             </a:r>
           </a:p>
         </p:txBody>
@@ -3383,43 +3583,14 @@
       <p:grpSpPr/>
       <p:sp>
         <p:nvSpPr>
-          <p:cNvPr id="2" name="Rectangle 1"/>
-          <p:cNvSpPr/>
-          <p:nvPr/>
-        </p:nvSpPr>
-        <p:spPr>
-          <a:xfrm>
-            <a:off x="252000" y="540000"/>
-            <a:ext cx="28800" cy="720000"/>
-          </a:xfrm>
-          <a:prstGeom prst="rect">
-            <a:avLst/>
-          </a:prstGeom>
-          <a:solidFill>
-            <a:srgbClr val="FF8A7A"/>
-          </a:solidFill>
-          <a:ln>
-            <a:noFill/>
-          </a:ln>
-        </p:spPr>
-        <p:txBody>
-          <a:bodyPr rtlCol="0" anchor="ctr"/>
-          <a:lstStyle/>
-          <a:p>
-            <a:pPr algn="ctr"/>
-          </a:p>
-        </p:txBody>
-      </p:sp>
-      <p:sp>
-        <p:nvSpPr>
-          <p:cNvPr id="3" name="텍스트"/>
+          <p:cNvPr id="2" name="텍스트"/>
           <p:cNvSpPr txBox="1"/>
           <p:nvPr/>
         </p:nvSpPr>
         <p:spPr>
           <a:xfrm>
-            <a:off x="424800" y="612000"/>
-            <a:ext cx="2160000" cy="648000"/>
+            <a:off x="252000" y="223200"/>
+            <a:ext cx="1080000" cy="99061"/>
           </a:xfrm>
           <a:prstGeom prst="rect">
             <a:avLst/>
@@ -3434,49 +3605,255 @@
           <a:p>
             <a:pPr algn="l">
               <a:lnSpc>
-                <a:spcPts val="1812"/>
+                <a:spcPts val="754"/>
               </a:lnSpc>
             </a:pPr>
             <a:r>
-              <a:rPr sz="1250" b="1">
+              <a:rPr sz="520" b="1" spc="240">
+                <a:solidFill>
+                  <a:srgbClr val="6B7280"/>
+                </a:solidFill>
+                <a:latin typeface="맑은 고딕"/>
+                <a:ea typeface="맑은 고딕"/>
+              </a:rPr>
+              <a:t>시술 안내</a:t>
+            </a:r>
+          </a:p>
+        </p:txBody>
+      </p:sp>
+      <p:cxnSp>
+        <p:nvCxnSpPr>
+          <p:cNvPr id="3" name="Connector 2"/>
+          <p:cNvCxnSpPr/>
+          <p:nvPr/>
+        </p:nvCxnSpPr>
+        <p:spPr>
+          <a:xfrm>
+            <a:off x="252000" y="388800"/>
+            <a:ext cx="2736000" cy="0"/>
+          </a:xfrm>
+          <a:prstGeom prst="line">
+            <a:avLst/>
+          </a:prstGeom>
+          <a:ln w="3600">
+            <a:solidFill>
+              <a:srgbClr val="DCDFE4"/>
+            </a:solidFill>
+          </a:ln>
+        </p:spPr>
+      </p:cxnSp>
+      <p:sp>
+        <p:nvSpPr>
+          <p:cNvPr id="4" name="텍스트"/>
+          <p:cNvSpPr txBox="1"/>
+          <p:nvPr/>
+        </p:nvSpPr>
+        <p:spPr>
+          <a:xfrm>
+            <a:off x="252000" y="468000"/>
+            <a:ext cx="216000" cy="99061"/>
+          </a:xfrm>
+          <a:prstGeom prst="rect">
+            <a:avLst/>
+          </a:prstGeom>
+          <a:noFill/>
+        </p:spPr>
+        <p:txBody>
+          <a:bodyPr wrap="square" lIns="0" rIns="0" tIns="0" bIns="0" anchor="t">
+            <a:spAutoFit/>
+          </a:bodyPr>
+          <a:lstStyle/>
+          <a:p>
+            <a:pPr algn="l">
+              <a:lnSpc>
+                <a:spcPts val="754"/>
+              </a:lnSpc>
+            </a:pPr>
+            <a:r>
+              <a:rPr sz="520" b="1" spc="100">
+                <a:solidFill>
+                  <a:srgbClr val="FF8A7A"/>
+                </a:solidFill>
+                <a:latin typeface="맑은 고딕"/>
+                <a:ea typeface="맑은 고딕"/>
+              </a:rPr>
+              <a:t>01</a:t>
+            </a:r>
+          </a:p>
+        </p:txBody>
+      </p:sp>
+      <p:sp>
+        <p:nvSpPr>
+          <p:cNvPr id="5" name="텍스트"/>
+          <p:cNvSpPr txBox="1"/>
+          <p:nvPr/>
+        </p:nvSpPr>
+        <p:spPr>
+          <a:xfrm>
+            <a:off x="475200" y="457200"/>
+            <a:ext cx="1152000" cy="140971"/>
+          </a:xfrm>
+          <a:prstGeom prst="rect">
+            <a:avLst/>
+          </a:prstGeom>
+          <a:noFill/>
+        </p:spPr>
+        <p:txBody>
+          <a:bodyPr wrap="square" lIns="0" rIns="0" tIns="0" bIns="0" anchor="t">
+            <a:spAutoFit/>
+          </a:bodyPr>
+          <a:lstStyle/>
+          <a:p>
+            <a:pPr algn="l">
+              <a:lnSpc>
+                <a:spcPts val="1073"/>
+              </a:lnSpc>
+            </a:pPr>
+            <a:r>
+              <a:rPr sz="740" b="0">
                 <a:solidFill>
                   <a:srgbClr val="12151C"/>
                 </a:solidFill>
                 <a:latin typeface="맑은 고딕"/>
                 <a:ea typeface="맑은 고딕"/>
               </a:rPr>
-              <a:t>가장 편안한 모습으로</a:t>
-            </a:r>
-          </a:p>
+              <a:t>커트</a:t>
+            </a:r>
+          </a:p>
+        </p:txBody>
+      </p:sp>
+      <p:cxnSp>
+        <p:nvCxnSpPr>
+          <p:cNvPr id="6" name="Connector 5"/>
+          <p:cNvCxnSpPr/>
+          <p:nvPr/>
+        </p:nvCxnSpPr>
+        <p:spPr>
+          <a:xfrm>
+            <a:off x="252000" y="691200"/>
+            <a:ext cx="1296000" cy="0"/>
+          </a:xfrm>
+          <a:prstGeom prst="line">
+            <a:avLst/>
+          </a:prstGeom>
+          <a:ln w="3600">
+            <a:solidFill>
+              <a:srgbClr val="DCDFE4"/>
+            </a:solidFill>
+          </a:ln>
+        </p:spPr>
+      </p:cxnSp>
+      <p:sp>
+        <p:nvSpPr>
+          <p:cNvPr id="7" name="텍스트"/>
+          <p:cNvSpPr txBox="1"/>
+          <p:nvPr/>
+        </p:nvSpPr>
+        <p:spPr>
+          <a:xfrm>
+            <a:off x="1656000" y="468000"/>
+            <a:ext cx="216000" cy="99061"/>
+          </a:xfrm>
+          <a:prstGeom prst="rect">
+            <a:avLst/>
+          </a:prstGeom>
+          <a:noFill/>
+        </p:spPr>
+        <p:txBody>
+          <a:bodyPr wrap="square" lIns="0" rIns="0" tIns="0" bIns="0" anchor="t">
+            <a:spAutoFit/>
+          </a:bodyPr>
+          <a:lstStyle/>
           <a:p>
             <a:pPr algn="l">
               <a:lnSpc>
-                <a:spcPts val="1812"/>
+                <a:spcPts val="754"/>
               </a:lnSpc>
             </a:pPr>
             <a:r>
-              <a:rPr sz="1250" b="1">
+              <a:rPr sz="520" b="1" spc="100">
+                <a:solidFill>
+                  <a:srgbClr val="FF8A7A"/>
+                </a:solidFill>
+                <a:latin typeface="맑은 고딕"/>
+                <a:ea typeface="맑은 고딕"/>
+              </a:rPr>
+              <a:t>02</a:t>
+            </a:r>
+          </a:p>
+        </p:txBody>
+      </p:sp>
+      <p:sp>
+        <p:nvSpPr>
+          <p:cNvPr id="8" name="텍스트"/>
+          <p:cNvSpPr txBox="1"/>
+          <p:nvPr/>
+        </p:nvSpPr>
+        <p:spPr>
+          <a:xfrm>
+            <a:off x="1879200" y="457200"/>
+            <a:ext cx="1152000" cy="140971"/>
+          </a:xfrm>
+          <a:prstGeom prst="rect">
+            <a:avLst/>
+          </a:prstGeom>
+          <a:noFill/>
+        </p:spPr>
+        <p:txBody>
+          <a:bodyPr wrap="square" lIns="0" rIns="0" tIns="0" bIns="0" anchor="t">
+            <a:spAutoFit/>
+          </a:bodyPr>
+          <a:lstStyle/>
+          <a:p>
+            <a:pPr algn="l">
+              <a:lnSpc>
+                <a:spcPts val="1073"/>
+              </a:lnSpc>
+            </a:pPr>
+            <a:r>
+              <a:rPr sz="740" b="0">
                 <a:solidFill>
                   <a:srgbClr val="12151C"/>
                 </a:solidFill>
                 <a:latin typeface="맑은 고딕"/>
                 <a:ea typeface="맑은 고딕"/>
               </a:rPr>
-              <a:t>돌려드립니다</a:t>
-            </a:r>
-          </a:p>
-        </p:txBody>
-      </p:sp>
-      <p:sp>
-        <p:nvSpPr>
-          <p:cNvPr id="4" name="텍스트"/>
+              <a:t>펌</a:t>
+            </a:r>
+          </a:p>
+        </p:txBody>
+      </p:sp>
+      <p:cxnSp>
+        <p:nvCxnSpPr>
+          <p:cNvPr id="9" name="Connector 8"/>
+          <p:cNvCxnSpPr/>
+          <p:nvPr/>
+        </p:nvCxnSpPr>
+        <p:spPr>
+          <a:xfrm>
+            <a:off x="1656000" y="691200"/>
+            <a:ext cx="1296000" cy="0"/>
+          </a:xfrm>
+          <a:prstGeom prst="line">
+            <a:avLst/>
+          </a:prstGeom>
+          <a:ln w="3600">
+            <a:solidFill>
+              <a:srgbClr val="DCDFE4"/>
+            </a:solidFill>
+          </a:ln>
+        </p:spPr>
+      </p:cxnSp>
+      <p:sp>
+        <p:nvSpPr>
+          <p:cNvPr id="10" name="텍스트"/>
           <p:cNvSpPr txBox="1"/>
           <p:nvPr/>
         </p:nvSpPr>
         <p:spPr>
           <a:xfrm>
-            <a:off x="424800" y="1512000"/>
-            <a:ext cx="1800000" cy="123826"/>
+            <a:off x="252000" y="813600"/>
+            <a:ext cx="216000" cy="99061"/>
           </a:xfrm>
           <a:prstGeom prst="rect">
             <a:avLst/>
@@ -3491,18 +3868,260 @@
           <a:p>
             <a:pPr algn="l">
               <a:lnSpc>
-                <a:spcPts val="942"/>
+                <a:spcPts val="754"/>
               </a:lnSpc>
             </a:pPr>
             <a:r>
-              <a:rPr sz="650" b="1" spc="200">
+              <a:rPr sz="520" b="1" spc="100">
+                <a:solidFill>
+                  <a:srgbClr val="FF8A7A"/>
+                </a:solidFill>
+                <a:latin typeface="맑은 고딕"/>
+                <a:ea typeface="맑은 고딕"/>
+              </a:rPr>
+              <a:t>03</a:t>
+            </a:r>
+          </a:p>
+        </p:txBody>
+      </p:sp>
+      <p:sp>
+        <p:nvSpPr>
+          <p:cNvPr id="11" name="텍스트"/>
+          <p:cNvSpPr txBox="1"/>
+          <p:nvPr/>
+        </p:nvSpPr>
+        <p:spPr>
+          <a:xfrm>
+            <a:off x="475200" y="802800"/>
+            <a:ext cx="1152000" cy="140971"/>
+          </a:xfrm>
+          <a:prstGeom prst="rect">
+            <a:avLst/>
+          </a:prstGeom>
+          <a:noFill/>
+        </p:spPr>
+        <p:txBody>
+          <a:bodyPr wrap="square" lIns="0" rIns="0" tIns="0" bIns="0" anchor="t">
+            <a:spAutoFit/>
+          </a:bodyPr>
+          <a:lstStyle/>
+          <a:p>
+            <a:pPr algn="l">
+              <a:lnSpc>
+                <a:spcPts val="1073"/>
+              </a:lnSpc>
+            </a:pPr>
+            <a:r>
+              <a:rPr sz="740" b="0">
+                <a:solidFill>
+                  <a:srgbClr val="12151C"/>
+                </a:solidFill>
+                <a:latin typeface="맑은 고딕"/>
+                <a:ea typeface="맑은 고딕"/>
+              </a:rPr>
+              <a:t>왁싱</a:t>
+            </a:r>
+          </a:p>
+        </p:txBody>
+      </p:sp>
+      <p:cxnSp>
+        <p:nvCxnSpPr>
+          <p:cNvPr id="12" name="Connector 11"/>
+          <p:cNvCxnSpPr/>
+          <p:nvPr/>
+        </p:nvCxnSpPr>
+        <p:spPr>
+          <a:xfrm>
+            <a:off x="252000" y="1036800"/>
+            <a:ext cx="1296000" cy="0"/>
+          </a:xfrm>
+          <a:prstGeom prst="line">
+            <a:avLst/>
+          </a:prstGeom>
+          <a:ln w="3600">
+            <a:solidFill>
+              <a:srgbClr val="DCDFE4"/>
+            </a:solidFill>
+          </a:ln>
+        </p:spPr>
+      </p:cxnSp>
+      <p:sp>
+        <p:nvSpPr>
+          <p:cNvPr id="13" name="텍스트"/>
+          <p:cNvSpPr txBox="1"/>
+          <p:nvPr/>
+        </p:nvSpPr>
+        <p:spPr>
+          <a:xfrm>
+            <a:off x="1656000" y="813600"/>
+            <a:ext cx="216000" cy="99061"/>
+          </a:xfrm>
+          <a:prstGeom prst="rect">
+            <a:avLst/>
+          </a:prstGeom>
+          <a:noFill/>
+        </p:spPr>
+        <p:txBody>
+          <a:bodyPr wrap="square" lIns="0" rIns="0" tIns="0" bIns="0" anchor="t">
+            <a:spAutoFit/>
+          </a:bodyPr>
+          <a:lstStyle/>
+          <a:p>
+            <a:pPr algn="l">
+              <a:lnSpc>
+                <a:spcPts val="754"/>
+              </a:lnSpc>
+            </a:pPr>
+            <a:r>
+              <a:rPr sz="520" b="1" spc="100">
+                <a:solidFill>
+                  <a:srgbClr val="FF8A7A"/>
+                </a:solidFill>
+                <a:latin typeface="맑은 고딕"/>
+                <a:ea typeface="맑은 고딕"/>
+              </a:rPr>
+              <a:t>04</a:t>
+            </a:r>
+          </a:p>
+        </p:txBody>
+      </p:sp>
+      <p:sp>
+        <p:nvSpPr>
+          <p:cNvPr id="14" name="텍스트"/>
+          <p:cNvSpPr txBox="1"/>
+          <p:nvPr/>
+        </p:nvSpPr>
+        <p:spPr>
+          <a:xfrm>
+            <a:off x="1879200" y="802800"/>
+            <a:ext cx="1152000" cy="140971"/>
+          </a:xfrm>
+          <a:prstGeom prst="rect">
+            <a:avLst/>
+          </a:prstGeom>
+          <a:noFill/>
+        </p:spPr>
+        <p:txBody>
+          <a:bodyPr wrap="square" lIns="0" rIns="0" tIns="0" bIns="0" anchor="t">
+            <a:spAutoFit/>
+          </a:bodyPr>
+          <a:lstStyle/>
+          <a:p>
+            <a:pPr algn="l">
+              <a:lnSpc>
+                <a:spcPts val="1073"/>
+              </a:lnSpc>
+            </a:pPr>
+            <a:r>
+              <a:rPr sz="740" b="0">
+                <a:solidFill>
+                  <a:srgbClr val="12151C"/>
+                </a:solidFill>
+                <a:latin typeface="맑은 고딕"/>
+                <a:ea typeface="맑은 고딕"/>
+              </a:rPr>
+              <a:t>두피 케어</a:t>
+            </a:r>
+          </a:p>
+        </p:txBody>
+      </p:sp>
+      <p:cxnSp>
+        <p:nvCxnSpPr>
+          <p:cNvPr id="15" name="Connector 14"/>
+          <p:cNvCxnSpPr/>
+          <p:nvPr/>
+        </p:nvCxnSpPr>
+        <p:spPr>
+          <a:xfrm>
+            <a:off x="1656000" y="1036800"/>
+            <a:ext cx="1296000" cy="0"/>
+          </a:xfrm>
+          <a:prstGeom prst="line">
+            <a:avLst/>
+          </a:prstGeom>
+          <a:ln w="3600">
+            <a:solidFill>
+              <a:srgbClr val="DCDFE4"/>
+            </a:solidFill>
+          </a:ln>
+        </p:spPr>
+      </p:cxnSp>
+      <p:sp>
+        <p:nvSpPr>
+          <p:cNvPr id="16" name="텍스트"/>
+          <p:cNvSpPr txBox="1"/>
+          <p:nvPr/>
+        </p:nvSpPr>
+        <p:spPr>
+          <a:xfrm>
+            <a:off x="252000" y="1569600"/>
+            <a:ext cx="1368000" cy="114301"/>
+          </a:xfrm>
+          <a:prstGeom prst="rect">
+            <a:avLst/>
+          </a:prstGeom>
+          <a:noFill/>
+        </p:spPr>
+        <p:txBody>
+          <a:bodyPr wrap="square" lIns="0" rIns="0" tIns="0" bIns="0" anchor="t">
+            <a:spAutoFit/>
+          </a:bodyPr>
+          <a:lstStyle/>
+          <a:p>
+            <a:pPr algn="l">
+              <a:lnSpc>
+                <a:spcPts val="869"/>
+              </a:lnSpc>
+            </a:pPr>
+            <a:r>
+              <a:rPr sz="600" b="0">
                 <a:solidFill>
                   <a:srgbClr val="6B7280"/>
                 </a:solidFill>
                 <a:latin typeface="맑은 고딕"/>
                 <a:ea typeface="맑은 고딕"/>
               </a:rPr>
-              <a:t>샵 이름</a:t>
+              <a:t>예약제 운영</a:t>
+            </a:r>
+          </a:p>
+        </p:txBody>
+      </p:sp>
+      <p:sp>
+        <p:nvSpPr>
+          <p:cNvPr id="17" name="텍스트"/>
+          <p:cNvSpPr txBox="1"/>
+          <p:nvPr/>
+        </p:nvSpPr>
+        <p:spPr>
+          <a:xfrm>
+            <a:off x="1620000" y="1569600"/>
+            <a:ext cx="1368000" cy="114301"/>
+          </a:xfrm>
+          <a:prstGeom prst="rect">
+            <a:avLst/>
+          </a:prstGeom>
+          <a:noFill/>
+        </p:spPr>
+        <p:txBody>
+          <a:bodyPr wrap="square" lIns="0" rIns="0" tIns="0" bIns="0" anchor="t">
+            <a:spAutoFit/>
+          </a:bodyPr>
+          <a:lstStyle/>
+          <a:p>
+            <a:pPr algn="r">
+              <a:lnSpc>
+                <a:spcPts val="869"/>
+              </a:lnSpc>
+            </a:pPr>
+            <a:r>
+              <a:rPr sz="600" b="0">
+                <a:solidFill>
+                  <a:srgbClr val="6B7280"/>
+                </a:solidFill>
+                <a:latin typeface="맑은 고딕"/>
+                <a:ea typeface="맑은 고딕"/>
+              </a:rPr>
+              <a:t>www.example.com</a:t>
             </a:r>
           </a:p>
         </p:txBody>
